--- a/assets/pptx/catalog-400.pptx
+++ b/assets/pptx/catalog-400.pptx
@@ -3313,7 +3313,7 @@
                 <a:ea typeface="Ebrima"/>
                 <a:cs typeface="Ebrima"/>
               </a:rPr>
-              <a:t>ይህንንም ይቅር ይላል (2x)</a:t>
+              <a:t>ይህንንም ይቅር ይላል 2x</a:t>
             </a:r>
           </a:p>
           <a:p>
@@ -3331,7 +3331,7 @@
                 <a:ea typeface="Ebrima"/>
                 <a:cs typeface="Ebrima"/>
               </a:rPr>
-              <a:t>ምህረት የናቀ ዛሬም ይፈርዳል በተማረው ልክ ማን ሰው ይምራል (2x)</a:t>
+              <a:t>ምህረት የናቀ ዛሬም ይፈርዳል በተማረው ልክ ማን ሰው ይምራል 2x</a:t>
             </a:r>
           </a:p>
           <a:p>
@@ -3511,7 +3511,7 @@
                 <a:ea typeface="Ebrima"/>
                 <a:cs typeface="Ebrima"/>
               </a:rPr>
-              <a:t>የማያልፈው . (1) . የእራሱን ቁስለት አያቆም መፍረድ በሰውም ማንነት ለከፋ ቁስል እንጨት ይሰዳል ለታመመ ሰው ይህ መች ይረዳል</a:t>
+              <a:t>የማያልፈው . 1 . የእራሱን ቁስለት አያቆም መፍረድ በሰውም ማንነት ለከፋ ቁስል እንጨት ይሰዳል ለታመመ ሰው ይህ መች ይረዳል</a:t>
             </a:r>
           </a:p>
           <a:p>
@@ -3673,7 +3673,7 @@
                 <a:ea typeface="Ebrima"/>
                 <a:cs typeface="Ebrima"/>
               </a:rPr>
-              <a:t>ይህንንም ይቅር ይላል (2x)</a:t>
+              <a:t>ይህንንም ይቅር ይላል 2x</a:t>
             </a:r>
           </a:p>
           <a:p>
@@ -3691,7 +3691,7 @@
                 <a:ea typeface="Ebrima"/>
                 <a:cs typeface="Ebrima"/>
               </a:rPr>
-              <a:t>ምህረት የናቀ ዛሬም ይፈርዳል በተማረው ልክ ማን ሰው ይምራል (2x)</a:t>
+              <a:t>ምህረት የናቀ ዛሬም ይፈርዳል በተማረው ልክ ማን ሰው ይምራል 2x</a:t>
             </a:r>
           </a:p>
         </p:txBody>
